--- a/docs/submission/variants/RASTA_AI_SIH26002_TEAM17_V08_LIFECYCLE.pptx
+++ b/docs/submission/variants/RASTA_AI_SIH26002_TEAM17_V08_LIFECYCLE.pptx
@@ -8288,7 +8288,7 @@
                 </a:solidFill>
                 <a:latin typeface="Calibri"/>
               </a:rPr>
-              <a:t>Missing or stale evidence is marked UNKNOWN, never counted as safe, and the route goes to an authorised reviewer.</a:t>
+              <a:t>Missing or stale evidence is marked UNKNOWN — never safe — and goes to an authorised reviewer.</a:t>
             </a:r>
           </a:p>
         </p:txBody>
@@ -10561,7 +10561,7 @@
                 </a:solidFill>
                 <a:latin typeface="Calibri"/>
               </a:rPr>
-              <a:t>Manager console — React + TypeScript, manager accounts only · Driver app — React Native / Expo, Android; one login, server-decided role, offline trip package</a:t>
+              <a:t>Manager console (React + TS) · Driver app (React Native / Expo, Android) · one login, server-decided role, offline package</a:t>
             </a:r>
           </a:p>
           <a:p>
@@ -10636,7 +10636,7 @@
                 </a:solidFill>
                 <a:latin typeface="Calibri"/>
               </a:rPr>
-              <a:t>Re-scored every 60 s along the road ahead; a reroute is proposed to the manager, never applied silently.</a:t>
+              <a:t>Re-scored every 60 s on the road ahead. A reroute is proposed to the manager, never applied silently.</a:t>
             </a:r>
           </a:p>
         </p:txBody>
@@ -13373,7 +13373,7 @@
                 </a:solidFill>
                 <a:latin typeface="Calibri"/>
               </a:rPr>
-              <a:t>The whole lifecycle above was run end to end on a physical Android phone against the hosted backend, on the real road.</a:t>
+              <a:t>Run end to end on a physical Android phone, hosted backend, real road.</a:t>
             </a:r>
           </a:p>
         </p:txBody>
@@ -13795,7 +13795,7 @@
                 </a:solidFill>
                 <a:latin typeface="Calibri"/>
               </a:rPr>
-              <a:t>Render cold start → warm /health before the demo  ·  provider rate limits → cached evidence + explicit UNKNOWN  ·  background push needs Firebase config → in-app alerts already work  ·  experimental ML → outside routing until the gate passes</a:t>
+              <a:t>Cold start → warm /health first  ·  rate limits → cached evidence + explicit UNKNOWN  ·  push needs Firebase → in-app alerts work  ·  experimental ML → outside routing</a:t>
             </a:r>
           </a:p>
         </p:txBody>
@@ -14500,7 +14500,7 @@
                 </a:solidFill>
                 <a:latin typeface="Calibri"/>
               </a:rPr>
-              <a:t>Route usability and uncertainty visible before dispatch; auditable decisions.</a:t>
+              <a:t>Usability and uncertainty visible before dispatch. Auditable.</a:t>
             </a:r>
           </a:p>
         </p:txBody>
@@ -14561,7 +14561,7 @@
                 </a:solidFill>
                 <a:latin typeface="Calibri"/>
               </a:rPr>
-              <a:t>Safer navigation, danger context, emergency support, 23 languages.</a:t>
+              <a:t>Danger context, emergency support, 23 languages.</a:t>
             </a:r>
           </a:p>
         </p:txBody>
@@ -14622,7 +14622,7 @@
                 </a:solidFill>
                 <a:latin typeface="Calibri"/>
               </a:rPr>
-              <a:t>More resilient access to food, medicine, fuel and relief supplies.</a:t>
+              <a:t>Resilient access to food, medicine, fuel, relief.</a:t>
             </a:r>
           </a:p>
         </p:txBody>
@@ -14664,7 +14664,7 @@
                 </a:solidFill>
                 <a:latin typeface="Calibri"/>
               </a:rPr>
-              <a:t>GOVERNMENT / OPERATIONS</a:t>
+              <a:t>GOVERNMENT / OPS</a:t>
             </a:r>
           </a:p>
           <a:p>
@@ -14683,7 +14683,7 @@
                 </a:solidFill>
                 <a:latin typeface="Calibri"/>
               </a:rPr>
-              <a:t>Auditable route evidence and disruption visibility per corridor.</a:t>
+              <a:t>Auditable evidence and disruption per corridor.</a:t>
             </a:r>
           </a:p>
         </p:txBody>
@@ -16272,7 +16272,7 @@
                 </a:solidFill>
                 <a:latin typeface="Calibri"/>
               </a:rPr>
-              <a:t>Real screens, APK 1.0.18. One login, server-decided role: a manager gets a mobile fleet view, a driver gets navigation. Each language shows its status — Verified, Draft or English fallback — so nobody is misled.</a:t>
+              <a:t>APK 1.0.18. One login, server-decided role. Every language shows its status — Verified, Draft or English fallback.</a:t>
             </a:r>
           </a:p>
         </p:txBody>
@@ -16943,7 +16943,7 @@
                 </a:solidFill>
                 <a:latin typeface="Calibri"/>
               </a:rPr>
-              <a:t>real road geometry, alternatives and turn steps; place search on the corridor</a:t>
+              <a:t>Road geometry, alternatives, turn steps.</a:t>
             </a:r>
           </a:p>
         </p:txBody>
@@ -17058,7 +17058,7 @@
                 </a:solidFill>
                 <a:latin typeface="Calibri"/>
               </a:rPr>
-              <a:t>forecast sampled along the road; climb, gradient and steep segments (GLO-90)</a:t>
+              <a:t>Forecast along the road; climb, gradient, steep segments.</a:t>
             </a:r>
           </a:p>
         </p:txBody>
@@ -17173,7 +17173,7 @@
                 </a:solidFill>
                 <a:latin typeface="Calibri"/>
               </a:rPr>
-              <a:t>official warnings polled with freshness; river discharge against its 30-day mean</a:t>
+              <a:t>Official warnings with freshness; discharge vs 30-day mean.</a:t>
             </a:r>
           </a:p>
         </p:txBody>
@@ -17288,7 +17288,7 @@
                 </a:solidFill>
                 <a:latin typeface="Calibri"/>
               </a:rPr>
-              <a:t>historical exposure; inventory 2007–2017, ≤5 km location-accuracy filter</a:t>
+              <a:t>Historical exposure, 2007–2017, ≤5 km accuracy.</a:t>
             </a:r>
           </a:p>
         </p:txBody>
@@ -17403,7 +17403,7 @@
                 </a:solidFill>
                 <a:latin typeface="Calibri"/>
               </a:rPr>
-              <a:t>explains the decision in the driver's language — never safety authority</a:t>
+              <a:t>Explains in the driver's language. Never safety authority.</a:t>
             </a:r>
           </a:p>
         </p:txBody>
@@ -17518,7 +17518,7 @@
                 </a:solidFill>
                 <a:latin typeface="Calibri"/>
               </a:rPr>
-              <a:t>AI-based smart logistics and accessibility intelligence for the NER</a:t>
+              <a:t>Smart logistics and accessibility intelligence for the NER.</a:t>
             </a:r>
           </a:p>
         </p:txBody>
@@ -17751,7 +17751,7 @@
                 </a:solidFill>
                 <a:latin typeface="Calibri"/>
               </a:rPr>
-              <a:t>on the NER geographic holdout — 154 catalogued events, no NER row used in training</a:t>
+              <a:t>NER geographic holdout · 154 events · no NER row in training</a:t>
             </a:r>
           </a:p>
         </p:txBody>
@@ -18444,7 +18444,7 @@
                 </a:solidFill>
                 <a:latin typeface="Calibri"/>
               </a:rPr>
-              <a:t>Strong recall was not enough. Held-out testing exposed the false-positive rate, so the gate keeps the model out of routing.</a:t>
+              <a:t>Recall was not enough. Held-out testing exposed the false-positive rate. The gate keeps it out of routing.</a:t>
             </a:r>
           </a:p>
         </p:txBody>
@@ -18486,7 +18486,7 @@
                 </a:solidFill>
                 <a:latin typeface="Calibri"/>
               </a:rPr>
-              <a:t>Precision 0.32 · F1 0.48 · PR-AUC 0.55 · ROC-AUC 0.83 · Brier 0.12 · calibrated logistic regression on NASA GLC + ERA5-Land rain + DEM slope · docs/HAZARD_ERROR_ANALYSIS.md</a:t>
+              <a:t>Precision 0.32 · F1 0.48 · PR-AUC 0.55 · ROC-AUC 0.83 · Brier 0.12  —  calibrated logistic regression, NASA GLC + ERA5-Land rain + DEM slope</a:t>
             </a:r>
           </a:p>
         </p:txBody>
@@ -18572,7 +18572,7 @@
                 </a:solidFill>
                 <a:latin typeface="Calibri"/>
               </a:rPr>
-              <a:t>gpm.nasa.gov/landslides (NASA GLC)  ·  sachet.ndma.gov.in  ·  global-flood.emergency.copernicus.eu (GloFAS)  ·  open-meteo.com · api.met.no  ·  opentopodata.org · Copernicus DEM  ·  project-osrm.org · openstreetmap.org  ·  github.com/nxtlucifer/ner-ai-logistics (repository, tests, model registry)</a:t>
+              <a:t>gpm.nasa.gov/landslides  ·  sachet.ndma.gov.in  ·  global-flood.emergency.copernicus.eu  ·  open-meteo.com  ·  api.met.no  ·  opentopodata.org  ·  project-osrm.org  ·  openstreetmap.org  ·  github.com/nxtlucifer/ner-ai-logistics</a:t>
             </a:r>
           </a:p>
         </p:txBody>
